--- a/public/fun/pack/pptx/birthdaypro/돌잔치프리미엄_09_감사인사중심_로제브론즈.pptx
+++ b/public/fun/pack/pptx/birthdaypro/돌잔치프리미엄_09_감사인사중심_로제브론즈.pptx
@@ -112,12 +112,12 @@
   <p:extLst>
     <p:ext uri="{521415D9-36F7-43E2-AB2F-B90AF26B5E84}">
       <p14:sectionLst xmlns:p14="http://schemas.microsoft.com/office/powerpoint/2010/main">
-        <p14:section name="시작" id="{9174DAAB-DB68-4CC7-B12C-EFBDEBC0637E}">
+        <p14:section name="시작" id="{F9752B85-01BA-45B8-A051-F6755E632055}">
           <p14:sldIdLst>
             <p14:sldId id="256"/>
           </p14:sldIdLst>
         </p14:section>
-        <p14:section name="본문" id="{E158C1C2-1766-4574-B8F0-D7EB217EF2E8}">
+        <p14:section name="본문" id="{68C6F8BA-1902-4E25-87BF-BB3CC97363E0}">
           <p14:sldIdLst>
             <p14:sldId id="257"/>
             <p14:sldId id="258"/>
@@ -125,7 +125,7 @@
             <p14:sldId id="260"/>
           </p14:sldIdLst>
         </p14:section>
-        <p14:section name="마무리" id="{72132B7A-31D2-42A1-9A8E-D6C86A809DDE}">
+        <p14:section name="마무리" id="{9117F091-8A36-4B80-8AB0-9D0CD143EA9E}">
           <p14:sldIdLst>
             <p14:sldId id="261"/>
           </p14:sldIdLst>
@@ -1417,7 +1417,7 @@
             </a:lvl1pPr>
           </a:lstStyle>
           <a:p>
-            <a:fld id="{696CCE47-AA80-405E-9E41-8378B5D645F9}" type="slidenum">
+            <a:fld id="{A5589242-E579-4EBA-81DE-31543B45DF62}" type="slidenum">
               <a:rPr lang="en-US"/>
               <a:t>‹#›</a:t>
             </a:fld>
@@ -2080,7 +2080,7 @@
             </a:lvl1pPr>
           </a:lstStyle>
           <a:p>
-            <a:fld id="{D11A97C6-5C37-4E82-B174-0ED66F5CA4BB}" type="slidenum">
+            <a:fld id="{9545EF7D-AFF1-4501-B284-1D75039C0B69}" type="slidenum">
               <a:rPr lang="en-US"/>
               <a:t>‹#›</a:t>
             </a:fld>
@@ -2764,7 +2764,7 @@
             </a:lvl1pPr>
           </a:lstStyle>
           <a:p>
-            <a:fld id="{595A3FD5-30A3-4E08-9759-C234DC043FC6}" type="slidenum">
+            <a:fld id="{C038FACE-D926-451B-9672-5768C3AF9618}" type="slidenum">
               <a:rPr lang="en-US"/>
               <a:t>‹#›</a:t>
             </a:fld>
@@ -3609,7 +3609,7 @@
           <a:p>
             <a:r>
               <a:rPr lang="ko-KR"/>
-              <a:t>아기 이름 · 0000. 00. 00</a:t>
+              <a:t>아기 이름 · 날짜 입력</a:t>
             </a:r>
           </a:p>
           <a:p>
@@ -3772,7 +3772,7 @@
           <a:bodyPr/>
           <a:lstStyle/>
           <a:p>
-            <a:fld id="{F63C0266-3B11-4A1F-8E97-E2F6DCAA9B8B}" type="slidenum">
+            <a:fld id="{9F8780CF-1C8D-49F8-AC16-96237DEED195}" type="slidenum">
               <a:rPr lang="en-US"/>
               <a:t>‹#›</a:t>
             </a:fld>
@@ -4372,7 +4372,7 @@
           <a:bodyPr/>
           <a:lstStyle/>
           <a:p>
-            <a:fld id="{E0CCA662-857E-440D-9920-8465B53D1A61}" type="slidenum">
+            <a:fld id="{5D8FA36D-7459-41BA-97F1-D1C518E7702E}" type="slidenum">
               <a:rPr lang="en-US"/>
               <a:t>‹#›</a:t>
             </a:fld>
@@ -4699,7 +4699,7 @@
           <a:bodyPr/>
           <a:lstStyle/>
           <a:p>
-            <a:fld id="{42EAF329-8FAE-4C3C-9E31-5A9C7AC15AD7}" type="slidenum">
+            <a:fld id="{782127DA-91FC-4FF1-8CCE-A40C33FB2C43}" type="slidenum">
               <a:rPr lang="en-US"/>
               <a:t>‹#›</a:t>
             </a:fld>
@@ -5554,7 +5554,7 @@
           <a:bodyPr/>
           <a:lstStyle/>
           <a:p>
-            <a:fld id="{8B8F2DAE-C28D-4497-A876-72656A915235}" type="slidenum">
+            <a:fld id="{4958F788-7DE1-4465-873D-6A578957105E}" type="slidenum">
               <a:rPr lang="en-US"/>
               <a:t>‹#›</a:t>
             </a:fld>
